--- a/slides/decks/s18-late-effects.pptx
+++ b/slides/decks/s18-late-effects.pptx
@@ -134,26 +134,26 @@
   <p:extLst>
     <p:ext uri="{521415D9-36F7-43E2-AB2F-B90AF26B5E84}">
       <p14:sectionLst xmlns:p14="http://schemas.microsoft.com/office/powerpoint/2010/main">
-        <p14:section name="Opening" id="{f10a87a9-33e8-22f8-44af-dc8c58adc19d}">
+        <p14:section name="Opening" id="{70707049-3ded-321a-09c1-4c80150a2e59}">
           <p14:sldIdLst>
             <p14:sldId id="256"/>
             <p14:sldId id="257"/>
           </p14:sldIdLst>
         </p14:section>
-        <p14:section name="Follow-up framework" id="{f09380be-645c-a577-931d-c83d42754492}">
+        <p14:section name="Follow-up framework" id="{203778ef-1545-8ab6-b361-767c3cf83f44}">
           <p14:sldIdLst>
             <p14:sldId id="258"/>
             <p14:sldId id="259"/>
           </p14:sldIdLst>
         </p14:section>
-        <p14:section name="Iron overload" id="{d6b19233-4f47-80ef-f544-cb87a7be4b92}">
+        <p14:section name="Iron overload" id="{eebdc6d2-aa51-1a68-163f-3e676e2144f4}">
           <p14:sldIdLst>
             <p14:sldId id="260"/>
             <p14:sldId id="261"/>
             <p14:sldId id="262"/>
           </p14:sldIdLst>
         </p14:section>
-        <p14:section name="Secondary neoplasia" id="{d6ebfc04-3095-7e42-ba36-d856a30cce2d}">
+        <p14:section name="Secondary neoplasia" id="{d80ad721-0f56-4695-75bd-0b57fb274b0a}">
           <p14:sldIdLst>
             <p14:sldId id="263"/>
             <p14:sldId id="264"/>
@@ -161,20 +161,20 @@
             <p14:sldId id="266"/>
           </p14:sldIdLst>
         </p14:section>
-        <p14:section name="Cardiometabolic disease" id="{5308ebb3-11b4-dd8e-2128-eeb46be0e5eb}">
+        <p14:section name="Cardiometabolic disease" id="{5ffa0954-93a0-3cf9-4739-0e8007025234}">
           <p14:sldIdLst>
             <p14:sldId id="267"/>
             <p14:sldId id="268"/>
           </p14:sldIdLst>
         </p14:section>
-        <p14:section name="Endocrine and fertility" id="{0fc13f1b-738a-7b6e-e9fc-fb1c0494183a}">
+        <p14:section name="Endocrine and fertility" id="{285b80e8-d53e-596a-e542-8c48f7bd30d0}">
           <p14:sldIdLst>
             <p14:sldId id="269"/>
             <p14:sldId id="270"/>
             <p14:sldId id="271"/>
           </p14:sldIdLst>
         </p14:section>
-        <p14:section name="Board questions" id="{99bf0a1d-859f-fb11-4ec9-5ad39554f7dc}">
+        <p14:section name="Board questions" id="{675b128d-8c39-01ae-6682-8dbc9344409b}">
           <p14:sldIdLst>
             <p14:sldId id="272"/>
             <p14:sldId id="273"/>
@@ -184,13 +184,13 @@
             <p14:sldId id="277"/>
           </p14:sldIdLst>
         </p14:section>
-        <p14:section name="References" id="{d2c635a6-68a0-a977-6ebc-fb96254907ef}">
+        <p14:section name="References" id="{2843f138-50d8-047c-f8bc-d2483f08e188}">
           <p14:sldIdLst>
             <p14:sldId id="278"/>
             <p14:sldId id="279"/>
           </p14:sldIdLst>
         </p14:section>
-        <p14:section name="Backup" id="{663566df-bc7a-80e3-4392-a00117a74caf}">
+        <p14:section name="Backup" id="{bad6d2d2-0585-eee7-da20-d561b299afa7}">
           <p14:sldIdLst>
             <p14:sldId id="280"/>
             <p14:sldId id="281"/>
@@ -764,6 +764,17 @@
               </a:spcAft>
             </a:pPr>
             <a:r>
+              <a:rPr lang="en-US" dirty="0"/>
+              <a:t>考題常把危險因子和癌別配對，例如 BuCy 配肺癌、HCV 配 HCC、HPV 配外陰和肛門，記得配對就能刪掉大部分選項。</a:t>
+            </a:r>
+          </a:p>
+          <a:p>
+            <a:pPr>
+              <a:spcAft>
+                <a:spcPts val="600"/>
+              </a:spcAft>
+            </a:pPr>
+            <a:r>
               <a:rPr lang="en-US" b="1" dirty="0"/>
               <a:t>講者提醒（不念出來）：</a:t>
             </a:r>
@@ -1794,6 +1805,17 @@
             </a:pPr>
             <a:r>
               <a:rPr lang="en-US" dirty="0"/>
+              <a:t>這題要想的是移植之後鐵會不會自己消失，以及去鐵的方法和目標。</a:t>
+            </a:r>
+          </a:p>
+          <a:p>
+            <a:pPr>
+              <a:spcAft>
+                <a:spcPts val="600"/>
+              </a:spcAft>
+            </a:pPr>
+            <a:r>
+              <a:rPr lang="en-US" dirty="0"/>
               <a:t>A 是觀察，B 是每 14 天放血 6 mL/kg，C 是 deferiprone 一天三次，D 是每六個月肝切片，E 是 ferritin 再升高才治療。</a:t>
             </a:r>
           </a:p>
@@ -1922,6 +1944,17 @@
               <a:t>A 是主要陷阱，以為不輸血鐵就會慢慢降，這在門診很常見。Angelucci 的前瞻性資料正好相反，不治療的話 transferrin saturation 無限期維持在高點。C 的 deferiprone 因為 agranulocytosis，在造血幹細胞疾病通常不用。D 肝切片不適合重複追蹤，E 等 ferritin 再升只會延長毒性鐵的暴露。</a:t>
             </a:r>
           </a:p>
+          <a:p>
+            <a:pPr>
+              <a:spcAft>
+                <a:spcPts val="600"/>
+              </a:spcAft>
+            </a:pPr>
+            <a:r>
+              <a:rPr lang="en-US" dirty="0"/>
+              <a:t>記住終點是正常的 transferrin saturation，不是某個 ferritin 數值。若她仍在用 cyclosporine 或造血還不穩，才比較會選 chelation。</a:t>
+            </a:r>
+          </a:p>
         </p:txBody>
       </p:sp>
       <p:sp>
@@ -2033,6 +2066,17 @@
             </a:pPr>
             <a:r>
               <a:rPr lang="en-US" dirty="0"/>
+              <a:t>題目刻意給了她接受 TBI 的年紀，請算一下什麼時候該開始。</a:t>
+            </a:r>
+          </a:p>
+          <a:p>
+            <a:pPr>
+              <a:spcAft>
+                <a:spcPts val="600"/>
+              </a:spcAft>
+            </a:pPr>
+            <a:r>
+              <a:rPr lang="en-US" dirty="0"/>
               <a:t>A 是只做自我檢查到 40 歲，B 是現在開始每一到兩年 mammography，C 是比照一般人 50 歲開始，D 是不用篩，E 是有 BRCA 突變才做。</a:t>
             </a:r>
           </a:p>
@@ -2172,6 +2216,17 @@
               <a:t>最後一段把 Ch. 55 和 56 拆成五張，代謝症候群的定義、心血管危險因子、甲狀腺和腎上腺、性腺功能，以及 fertility preservation，接著是三題練習。這一堂的考點多半是具體的門檻和時間點，聽的時候可以把數字記下來。</a:t>
             </a:r>
           </a:p>
+          <a:p>
+            <a:pPr>
+              <a:spcAft>
+                <a:spcPts val="600"/>
+              </a:spcAft>
+            </a:pPr>
+            <a:r>
+              <a:rPr lang="en-US" dirty="0"/>
+              <a:t>Ch. 22 的表會一路串起後面各章，ferritin 接 Ch. 46，第二癌接 Ch. 47，代謝和內分泌接 Ch. 55、56。</a:t>
+            </a:r>
+          </a:p>
         </p:txBody>
       </p:sp>
       <p:sp>
@@ -2286,6 +2341,17 @@
               <a:t>C 是最常見的錯，把一般族群的建議直接套上去。乳癌是 radiation-related、潛伏期長的第二癌，移植後二十五年累積 11%，所以書上要求提早。D 正好相反，E 的 BRCA 不是這裡的條件。子宮頸抹片的規則是取較早者，和乳房相反。</a:t>
             </a:r>
           </a:p>
+          <a:p>
+            <a:pPr>
+              <a:spcAft>
+                <a:spcPts val="600"/>
+              </a:spcAft>
+            </a:pPr>
+            <a:r>
+              <a:rPr lang="en-US" dirty="0"/>
+              <a:t>算的時候記住兩個數字，25 歲和 8 年，取晚的，上限 40 歲。如果她是 15 歲照 TBI，加 8 年是 23 歲，比 25 早，那就從 25 歲開始。</a:t>
+            </a:r>
+          </a:p>
         </p:txBody>
       </p:sp>
       <p:sp>
@@ -2525,6 +2591,17 @@
               <a:t>A 是最大的陷阱，皮膚和肝臟都沒有惡化，卻直接回到高劑量 steroid，等於沒有找原因。C 的 GI GVHD 不是第一個要排除的。D 的甲狀腺功能低下也會疲倦，但解釋不了低血壓和停藥的時間關係。</a:t>
             </a:r>
           </a:p>
+          <a:p>
+            <a:pPr>
+              <a:spcAft>
+                <a:spcPts val="600"/>
+              </a:spcAft>
+            </a:pPr>
+            <a:r>
+              <a:rPr lang="en-US" dirty="0"/>
+              <a:t>E 也不對，停藥後的症狀不能直接歸給 withdrawal，沒驗就不知道她的軸有沒有恢復。這種病人以後生病或手術，都要記得給 stress dose。</a:t>
+            </a:r>
+          </a:p>
         </p:txBody>
       </p:sp>
       <p:sp>
@@ -3049,7 +3126,7 @@
           <a:p>
             <a:r>
               <a:rPr lang="en-US" dirty="0"/>
-              <a:t>性功能障礙是移植後最常見的問題之一。移植指引建議六個月、一年、之後每年主動詢問。Syrjala 的兩個篩檢問題都回答是，就做完整評估：先處理荷爾蒙缺乏、勃起功能障礙、陰道乾燥或生殖道 GVHD，再做個人或伴侶諮商。</a:t>
+              <a:t>性功能障礙是移植後最常見的問題之一。移植指引建議六個月、一年、之後每年主動詢問。Syrjala 的兩個篩檢問題都回答是，就做完整評估，先處理荷爾蒙缺乏、勃起功能障礙、陰道乾燥或生殖道 GVHD，再做個人或伴侶諮商。</a:t>
             </a:r>
             <a:endParaRPr lang="en-US" dirty="0"/>
           </a:p>
@@ -3325,6 +3402,17 @@
               <a:t>第二癌從一年開始衛教和自我檢查，做過 TBI 的人 mammography 要更頻繁。眼睛的部分，每次都問症狀，一年時做視力和眼底，特別注意 sicca。表上最後還有心理社會、生活品質和性功能，六個月、一年、之後每年都要評估。</a:t>
             </a:r>
           </a:p>
+          <a:p>
+            <a:pPr>
+              <a:spcAft>
+                <a:spcPts val="600"/>
+              </a:spcAft>
+            </a:pPr>
+            <a:r>
+              <a:rPr lang="en-US" dirty="0"/>
+              <a:t>肌肉和結締組織也在表上，有 chronic GVHD 風險的人要測關節活動度、摸皮膚找硬化。這張表的用法，是把它當成每年門診的 checklist，一列一列打勾，比靠記憶可靠。</a:t>
+            </a:r>
+          </a:p>
         </p:txBody>
       </p:sp>
       <p:sp>
@@ -3878,6 +3966,17 @@
             <a:r>
               <a:rPr lang="en-US" dirty="0"/>
               <a:t>Donor-derived malignancy 只發生在 allo-HCT，15 年累積不到 1%，卻可能占移植後 leukemia「復發」的 5%。所以移植後復發，要對惡性細胞做 chimerism，分清是 donor 還是 recipient 來源。超過 20% 的 donor-derived myeloid neoplasm 帶第七號染色體異常。</a:t>
+            </a:r>
+          </a:p>
+          <a:p>
+            <a:pPr>
+              <a:spcAft>
+                <a:spcPts val="600"/>
+              </a:spcAft>
+            </a:pPr>
+            <a:r>
+              <a:rPr lang="en-US" dirty="0"/>
+              <a:t>DDM 的危險因子書上列了四個可能，移植物裡本來就有惡性 donor clone、G-CSF、in vivo T-cell depletion 和多次移植。機轉包括 donor 的 germline 或 somatic mutation、骨髓微環境受損，以及移植後快速擴增的壓力。Donor 帶 clonal hematopoiesis 要不要排除，書上認為仍有爭議。t-MN 方面，15 到 20% 帶 germline 癌症易感性，化療造成的 CHIP 常是多重打擊的第一步。</a:t>
             </a:r>
           </a:p>
           <a:p>
@@ -7565,7 +7664,7 @@
                             <a:schemeClr val="tx1"/>
                           </a:solidFill>
                         </a:rPr>
-                        <a:t>Lung, liver</a:t>
+                        <a:t>Lung</a:t>
                       </a:r>
                       <a:endParaRPr lang="en-US" sz="1500" dirty="0"/>
                     </a:p>
@@ -7645,7 +7744,7 @@
                             <a:schemeClr val="tx1"/>
                           </a:solidFill>
                         </a:rPr>
-                        <a:t>High-dose Bu + smoking: chest CT; HCV: fibrosis 8–10 y</a:t>
+                        <a:t>High-dose busulfan + smoking: chest CT</a:t>
                       </a:r>
                       <a:endParaRPr lang="en-US" sz="1500" dirty="0"/>
                     </a:p>
@@ -10300,7 +10399,7 @@
                             <a:schemeClr val="tx1"/>
                           </a:solidFill>
                         </a:rPr>
-                        <a:t>Hypogonadism, premature menopause,</a:t>
+                        <a:t>Hypogonadism, early menopause,</a:t>
                       </a:r>
                       <a:endParaRPr lang="en-US" sz="1500" dirty="0"/>
                     </a:p>
@@ -10393,7 +10492,7 @@
         </p:nvSpPr>
         <p:spPr>
           <a:xfrm>
-            <a:off x="685800" y="5440680"/>
+            <a:off x="685800" y="5504688"/>
             <a:ext cx="10817352" cy="411480"/>
           </a:xfrm>
           <a:prstGeom prst="rect">
@@ -20945,7 +21044,7 @@
                             <a:schemeClr val="tx1"/>
                           </a:solidFill>
                         </a:rPr>
-                        <a:t>Turning point: care may return</a:t>
+                        <a:t>Care may return to referring doctor;</a:t>
                       </a:r>
                       <a:endParaRPr lang="en-US" sz="1500" dirty="0"/>
                     </a:p>
@@ -20959,7 +21058,7 @@
                             <a:schemeClr val="tx1"/>
                           </a:solidFill>
                         </a:rPr>
-                        <a:t>to the referring doctor</a:t>
+                        <a:t>children &lt; 17 y: height, weight every 3 m</a:t>
                       </a:r>
                       <a:endParaRPr lang="en-US" sz="1500" dirty="0"/>
                     </a:p>
@@ -21206,7 +21305,7 @@
                     <a:lnT w="0" cap="flat" cmpd="sng" algn="ctr">
                       <a:noFill/>
                     </a:lnT>
-                    <a:lnB w="6350" cap="flat" cmpd="sng" algn="ctr">
+                    <a:lnB w="19050" cap="flat" cmpd="sng" algn="ctr">
                       <a:solidFill>
                         <a:srgbClr val="000000"/>
                       </a:solidFill>
@@ -21260,7 +21359,7 @@
                     <a:lnT w="0" cap="flat" cmpd="sng" algn="ctr">
                       <a:noFill/>
                     </a:lnT>
-                    <a:lnB w="6350" cap="flat" cmpd="sng" algn="ctr">
+                    <a:lnB w="19050" cap="flat" cmpd="sng" algn="ctr">
                       <a:solidFill>
                         <a:srgbClr val="000000"/>
                       </a:solidFill>
@@ -21300,128 +21399,6 @@
                           </a:solidFill>
                         </a:rPr>
                         <a:t>for at least 5 years</a:t>
-                      </a:r>
-                      <a:endParaRPr lang="en-US" sz="1500" dirty="0"/>
-                    </a:p>
-                  </a:txBody>
-                  <a:tcPr marL="25400" marR="101600" marT="63500" marB="63500" anchor="ctr">
-                    <a:lnL w="0" cap="flat" cmpd="sng" algn="ctr">
-                      <a:noFill/>
-                    </a:lnL>
-                    <a:lnR w="0" cap="flat" cmpd="sng" algn="ctr">
-                      <a:noFill/>
-                    </a:lnR>
-                    <a:lnT w="0" cap="flat" cmpd="sng" algn="ctr">
-                      <a:noFill/>
-                    </a:lnT>
-                    <a:lnB w="6350" cap="flat" cmpd="sng" algn="ctr">
-                      <a:solidFill>
-                        <a:srgbClr val="000000"/>
-                      </a:solidFill>
-                      <a:prstDash val="solid"/>
-                      <a:round/>
-                      <a:headEnd type="none" w="med" len="med"/>
-                      <a:tailEnd type="none" w="med" len="med"/>
-                    </a:lnB>
-                  </a:tcPr>
-                </a:tc>
-              </a:tr>
-              <a:tr h="0">
-                <a:tc>
-                  <a:txBody>
-                    <a:bodyPr/>
-                    <a:lstStyle/>
-                    <a:p>
-                      <a:pPr indent="0" marL="0">
-                        <a:buNone/>
-                      </a:pPr>
-                      <a:r>
-                        <a:rPr lang="en-US" sz="1500" dirty="0">
-                          <a:solidFill>
-                            <a:schemeClr val="tx1"/>
-                          </a:solidFill>
-                        </a:rPr>
-                        <a:t>Children &lt; 17 years</a:t>
-                      </a:r>
-                      <a:endParaRPr lang="en-US" sz="1500" dirty="0"/>
-                    </a:p>
-                  </a:txBody>
-                  <a:tcPr marL="25400" marR="101600" marT="63500" marB="63500" anchor="ctr">
-                    <a:lnL w="0" cap="flat" cmpd="sng" algn="ctr">
-                      <a:noFill/>
-                    </a:lnL>
-                    <a:lnR w="0" cap="flat" cmpd="sng" algn="ctr">
-                      <a:noFill/>
-                    </a:lnR>
-                    <a:lnT w="0" cap="flat" cmpd="sng" algn="ctr">
-                      <a:noFill/>
-                    </a:lnT>
-                    <a:lnB w="19050" cap="flat" cmpd="sng" algn="ctr">
-                      <a:solidFill>
-                        <a:srgbClr val="000000"/>
-                      </a:solidFill>
-                      <a:prstDash val="solid"/>
-                      <a:round/>
-                      <a:headEnd type="none" w="med" len="med"/>
-                      <a:tailEnd type="none" w="med" len="med"/>
-                    </a:lnB>
-                  </a:tcPr>
-                </a:tc>
-                <a:tc>
-                  <a:txBody>
-                    <a:bodyPr/>
-                    <a:lstStyle/>
-                    <a:p>
-                      <a:pPr indent="0" marL="0">
-                        <a:buNone/>
-                      </a:pPr>
-                      <a:r>
-                        <a:rPr lang="en-US" sz="1500" dirty="0">
-                          <a:solidFill>
-                            <a:schemeClr val="tx1"/>
-                          </a:solidFill>
-                        </a:rPr>
-                        <a:t>Weight and height every 3 months</a:t>
-                      </a:r>
-                      <a:endParaRPr lang="en-US" sz="1500" dirty="0"/>
-                    </a:p>
-                  </a:txBody>
-                  <a:tcPr marL="25400" marR="101600" marT="63500" marB="63500" anchor="ctr">
-                    <a:lnL w="0" cap="flat" cmpd="sng" algn="ctr">
-                      <a:noFill/>
-                    </a:lnL>
-                    <a:lnR w="0" cap="flat" cmpd="sng" algn="ctr">
-                      <a:noFill/>
-                    </a:lnR>
-                    <a:lnT w="0" cap="flat" cmpd="sng" algn="ctr">
-                      <a:noFill/>
-                    </a:lnT>
-                    <a:lnB w="19050" cap="flat" cmpd="sng" algn="ctr">
-                      <a:solidFill>
-                        <a:srgbClr val="000000"/>
-                      </a:solidFill>
-                      <a:prstDash val="solid"/>
-                      <a:round/>
-                      <a:headEnd type="none" w="med" len="med"/>
-                      <a:tailEnd type="none" w="med" len="med"/>
-                    </a:lnB>
-                  </a:tcPr>
-                </a:tc>
-                <a:tc>
-                  <a:txBody>
-                    <a:bodyPr/>
-                    <a:lstStyle/>
-                    <a:p>
-                      <a:pPr indent="0" marL="0">
-                        <a:buNone/>
-                      </a:pPr>
-                      <a:r>
-                        <a:rPr lang="en-US" sz="1500" dirty="0">
-                          <a:solidFill>
-                            <a:schemeClr val="tx1"/>
-                          </a:solidFill>
-                        </a:rPr>
-                        <a:t>—</a:t>
                       </a:r>
                       <a:endParaRPr lang="en-US" sz="1500" dirty="0"/>
                     </a:p>
@@ -22877,21 +22854,7 @@
                             <a:schemeClr val="tx1"/>
                           </a:solidFill>
                         </a:rPr>
-                        <a:t>PJP, encapsulated-organism</a:t>
-                      </a:r>
-                      <a:endParaRPr lang="en-US" sz="1400" dirty="0"/>
-                    </a:p>
-                    <a:p>
-                      <a:pPr indent="0" marL="0">
-                        <a:buNone/>
-                      </a:pPr>
-                      <a:r>
-                        <a:rPr lang="en-US" sz="1400" dirty="0">
-                          <a:solidFill>
-                            <a:schemeClr val="tx1"/>
-                          </a:solidFill>
-                        </a:rPr>
-                        <a:t>prophylaxis</a:t>
+                        <a:t>PJP, encapsulated-organism cover</a:t>
                       </a:r>
                       <a:endParaRPr lang="en-US" sz="1400" dirty="0"/>
                     </a:p>
@@ -23053,21 +23016,7 @@
                             <a:schemeClr val="tx1"/>
                           </a:solidFill>
                         </a:rPr>
-                        <a:t>Counselling, self-exam,</a:t>
-                      </a:r>
-                      <a:endParaRPr lang="en-US" sz="1400" dirty="0"/>
-                    </a:p>
-                    <a:p>
-                      <a:pPr indent="0" marL="0">
-                        <a:buNone/>
-                      </a:pPr>
-                      <a:r>
-                        <a:rPr lang="en-US" sz="1400" dirty="0">
-                          <a:solidFill>
-                            <a:schemeClr val="tx1"/>
-                          </a:solidFill>
-                        </a:rPr>
-                        <a:t>population screening</a:t>
+                        <a:t>Counselling, population screening</a:t>
                       </a:r>
                       <a:endParaRPr lang="en-US" sz="1400" dirty="0"/>
                     </a:p>
@@ -23186,7 +23135,7 @@
         </p:nvSpPr>
         <p:spPr>
           <a:xfrm>
-            <a:off x="685800" y="5486400"/>
+            <a:off x="685800" y="5504688"/>
             <a:ext cx="10817352" cy="411480"/>
           </a:xfrm>
           <a:prstGeom prst="rect">
@@ -26473,7 +26422,7 @@
                             <a:schemeClr val="tx1"/>
                           </a:solidFill>
                         </a:rPr>
-                        <a:t>Setting</a:t>
+                        <a:t>Setting, timing</a:t>
                       </a:r>
                       <a:endParaRPr lang="en-US" sz="1400" dirty="0"/>
                     </a:p>
@@ -26527,7 +26476,7 @@
                             <a:schemeClr val="tx1"/>
                           </a:solidFill>
                         </a:rPr>
-                        <a:t>rare after allo</a:t>
+                        <a:t>mostly within 10 years</a:t>
                       </a:r>
                       <a:endParaRPr lang="en-US" sz="1400" dirty="0"/>
                     </a:p>
@@ -26567,10 +26516,24 @@
                             <a:schemeClr val="tx1"/>
                           </a:solidFill>
                         </a:rPr>
-                        <a:t>Allo-HCT only</a:t>
+                        <a:t>Allo-HCT only;</a:t>
                       </a:r>
                       <a:endParaRPr lang="en-US" sz="1400" dirty="0"/>
                     </a:p>
+                    <a:p>
+                      <a:pPr indent="0" marL="0">
+                        <a:buNone/>
+                      </a:pPr>
+                      <a:r>
+                        <a:rPr lang="en-US" sz="1400" dirty="0">
+                          <a:solidFill>
+                            <a:schemeClr val="tx1"/>
+                          </a:solidFill>
+                        </a:rPr>
+                        <a:t>timing variable</a:t>
+                      </a:r>
+                      <a:endParaRPr lang="en-US" sz="1400" dirty="0"/>
+                    </a:p>
                   </a:txBody>
                   <a:tcPr marL="25400" marR="101600" marT="63500" marB="63500" anchor="ctr">
                     <a:lnL w="0" cap="flat" cmpd="sng" algn="ctr">
@@ -26607,38 +26570,10 @@
                             <a:schemeClr val="tx1"/>
                           </a:solidFill>
                         </a:rPr>
-                        <a:t>Auto- and allo-HCT</a:t>
+                        <a:t>Auto and allo; rises</a:t>
                       </a:r>
                       <a:endParaRPr lang="en-US" sz="1400" dirty="0"/>
                     </a:p>
-                  </a:txBody>
-                  <a:tcPr marL="25400" marR="101600" marT="63500" marB="63500" anchor="ctr">
-                    <a:lnL w="0" cap="flat" cmpd="sng" algn="ctr">
-                      <a:noFill/>
-                    </a:lnL>
-                    <a:lnR w="0" cap="flat" cmpd="sng" algn="ctr">
-                      <a:noFill/>
-                    </a:lnR>
-                    <a:lnT w="0" cap="flat" cmpd="sng" algn="ctr">
-                      <a:noFill/>
-                    </a:lnT>
-                    <a:lnB w="6350" cap="flat" cmpd="sng" algn="ctr">
-                      <a:solidFill>
-                        <a:srgbClr val="000000"/>
-                      </a:solidFill>
-                      <a:prstDash val="solid"/>
-                      <a:round/>
-                      <a:headEnd type="none" w="med" len="med"/>
-                      <a:tailEnd type="none" w="med" len="med"/>
-                    </a:lnB>
-                  </a:tcPr>
-                </a:tc>
-              </a:tr>
-              <a:tr h="0">
-                <a:tc>
-                  <a:txBody>
-                    <a:bodyPr/>
-                    <a:lstStyle/>
                     <a:p>
                       <a:pPr indent="0" marL="0">
                         <a:buNone/>
@@ -26649,127 +26584,7 @@
                             <a:schemeClr val="tx1"/>
                           </a:solidFill>
                         </a:rPr>
-                        <a:t>Timing</a:t>
-                      </a:r>
-                      <a:endParaRPr lang="en-US" sz="1400" dirty="0"/>
-                    </a:p>
-                  </a:txBody>
-                  <a:tcPr marL="25400" marR="101600" marT="63500" marB="63500" anchor="ctr">
-                    <a:lnL w="0" cap="flat" cmpd="sng" algn="ctr">
-                      <a:noFill/>
-                    </a:lnL>
-                    <a:lnR w="0" cap="flat" cmpd="sng" algn="ctr">
-                      <a:noFill/>
-                    </a:lnR>
-                    <a:lnT w="0" cap="flat" cmpd="sng" algn="ctr">
-                      <a:noFill/>
-                    </a:lnT>
-                    <a:lnB w="6350" cap="flat" cmpd="sng" algn="ctr">
-                      <a:solidFill>
-                        <a:srgbClr val="000000"/>
-                      </a:solidFill>
-                      <a:prstDash val="solid"/>
-                      <a:round/>
-                      <a:headEnd type="none" w="med" len="med"/>
-                      <a:tailEnd type="none" w="med" len="med"/>
-                    </a:lnB>
-                  </a:tcPr>
-                </a:tc>
-                <a:tc>
-                  <a:txBody>
-                    <a:bodyPr/>
-                    <a:lstStyle/>
-                    <a:p>
-                      <a:pPr indent="0" marL="0">
-                        <a:buNone/>
-                      </a:pPr>
-                      <a:r>
-                        <a:rPr lang="en-US" sz="1400" dirty="0">
-                          <a:solidFill>
-                            <a:schemeClr val="tx1"/>
-                          </a:solidFill>
-                        </a:rPr>
-                        <a:t>Mostly within 10 years</a:t>
-                      </a:r>
-                      <a:endParaRPr lang="en-US" sz="1400" dirty="0"/>
-                    </a:p>
-                  </a:txBody>
-                  <a:tcPr marL="25400" marR="101600" marT="63500" marB="63500" anchor="ctr">
-                    <a:lnL w="0" cap="flat" cmpd="sng" algn="ctr">
-                      <a:noFill/>
-                    </a:lnL>
-                    <a:lnR w="0" cap="flat" cmpd="sng" algn="ctr">
-                      <a:noFill/>
-                    </a:lnR>
-                    <a:lnT w="0" cap="flat" cmpd="sng" algn="ctr">
-                      <a:noFill/>
-                    </a:lnT>
-                    <a:lnB w="6350" cap="flat" cmpd="sng" algn="ctr">
-                      <a:solidFill>
-                        <a:srgbClr val="000000"/>
-                      </a:solidFill>
-                      <a:prstDash val="solid"/>
-                      <a:round/>
-                      <a:headEnd type="none" w="med" len="med"/>
-                      <a:tailEnd type="none" w="med" len="med"/>
-                    </a:lnB>
-                  </a:tcPr>
-                </a:tc>
-                <a:tc>
-                  <a:txBody>
-                    <a:bodyPr/>
-                    <a:lstStyle/>
-                    <a:p>
-                      <a:pPr indent="0" marL="0">
-                        <a:buNone/>
-                      </a:pPr>
-                      <a:r>
-                        <a:rPr lang="en-US" sz="1400" dirty="0">
-                          <a:solidFill>
-                            <a:schemeClr val="tx1"/>
-                          </a:solidFill>
-                        </a:rPr>
-                        <a:t>Variable</a:t>
-                      </a:r>
-                      <a:endParaRPr lang="en-US" sz="1400" dirty="0"/>
-                    </a:p>
-                  </a:txBody>
-                  <a:tcPr marL="25400" marR="101600" marT="63500" marB="63500" anchor="ctr">
-                    <a:lnL w="0" cap="flat" cmpd="sng" algn="ctr">
-                      <a:noFill/>
-                    </a:lnL>
-                    <a:lnR w="0" cap="flat" cmpd="sng" algn="ctr">
-                      <a:noFill/>
-                    </a:lnR>
-                    <a:lnT w="0" cap="flat" cmpd="sng" algn="ctr">
-                      <a:noFill/>
-                    </a:lnT>
-                    <a:lnB w="6350" cap="flat" cmpd="sng" algn="ctr">
-                      <a:solidFill>
-                        <a:srgbClr val="000000"/>
-                      </a:solidFill>
-                      <a:prstDash val="solid"/>
-                      <a:round/>
-                      <a:headEnd type="none" w="med" len="med"/>
-                      <a:tailEnd type="none" w="med" len="med"/>
-                    </a:lnB>
-                  </a:tcPr>
-                </a:tc>
-                <a:tc>
-                  <a:txBody>
-                    <a:bodyPr/>
-                    <a:lstStyle/>
-                    <a:p>
-                      <a:pPr indent="0" marL="0">
-                        <a:buNone/>
-                      </a:pPr>
-                      <a:r>
-                        <a:rPr lang="en-US" sz="1400" dirty="0">
-                          <a:solidFill>
-                            <a:schemeClr val="tx1"/>
-                          </a:solidFill>
-                        </a:rPr>
-                        <a:t>Rises with longer follow-up</a:t>
+                        <a:t>with longer follow-up</a:t>
                       </a:r>
                       <a:endParaRPr lang="en-US" sz="1400" dirty="0"/>
                     </a:p>

--- a/slides/decks/s18-late-effects.pptx
+++ b/slides/decks/s18-late-effects.pptx
@@ -134,26 +134,26 @@
   <p:extLst>
     <p:ext uri="{521415D9-36F7-43E2-AB2F-B90AF26B5E84}">
       <p14:sectionLst xmlns:p14="http://schemas.microsoft.com/office/powerpoint/2010/main">
-        <p14:section name="Opening" id="{70707049-3ded-321a-09c1-4c80150a2e59}">
+        <p14:section name="Opening" id="{dcf01893-834e-aab1-fc21-f7cedd8463d7}">
           <p14:sldIdLst>
             <p14:sldId id="256"/>
             <p14:sldId id="257"/>
           </p14:sldIdLst>
         </p14:section>
-        <p14:section name="Follow-up framework" id="{203778ef-1545-8ab6-b361-767c3cf83f44}">
+        <p14:section name="Follow-up framework" id="{5a396199-593c-4322-e132-dcfbf7e50abc}">
           <p14:sldIdLst>
             <p14:sldId id="258"/>
             <p14:sldId id="259"/>
           </p14:sldIdLst>
         </p14:section>
-        <p14:section name="Iron overload" id="{eebdc6d2-aa51-1a68-163f-3e676e2144f4}">
+        <p14:section name="Iron overload" id="{c7246153-e45c-a53f-95fe-d58b1c0d5de0}">
           <p14:sldIdLst>
             <p14:sldId id="260"/>
             <p14:sldId id="261"/>
             <p14:sldId id="262"/>
           </p14:sldIdLst>
         </p14:section>
-        <p14:section name="Secondary neoplasia" id="{d80ad721-0f56-4695-75bd-0b57fb274b0a}">
+        <p14:section name="Secondary neoplasia" id="{b8aa829a-e17d-4aab-1ae9-3e14af048604}">
           <p14:sldIdLst>
             <p14:sldId id="263"/>
             <p14:sldId id="264"/>
@@ -161,20 +161,20 @@
             <p14:sldId id="266"/>
           </p14:sldIdLst>
         </p14:section>
-        <p14:section name="Cardiometabolic disease" id="{5ffa0954-93a0-3cf9-4739-0e8007025234}">
+        <p14:section name="Cardiometabolic disease" id="{dde81a40-bfff-6eb2-7c0d-b8f707367428}">
           <p14:sldIdLst>
             <p14:sldId id="267"/>
             <p14:sldId id="268"/>
           </p14:sldIdLst>
         </p14:section>
-        <p14:section name="Endocrine and fertility" id="{285b80e8-d53e-596a-e542-8c48f7bd30d0}">
+        <p14:section name="Endocrine and fertility" id="{d906355c-0cde-543a-96bd-355c34dddee6}">
           <p14:sldIdLst>
             <p14:sldId id="269"/>
             <p14:sldId id="270"/>
             <p14:sldId id="271"/>
           </p14:sldIdLst>
         </p14:section>
-        <p14:section name="Board questions" id="{675b128d-8c39-01ae-6682-8dbc9344409b}">
+        <p14:section name="Board questions" id="{7104862d-9856-02ee-a79c-d93b8d071b46}">
           <p14:sldIdLst>
             <p14:sldId id="272"/>
             <p14:sldId id="273"/>
@@ -184,13 +184,13 @@
             <p14:sldId id="277"/>
           </p14:sldIdLst>
         </p14:section>
-        <p14:section name="References" id="{2843f138-50d8-047c-f8bc-d2483f08e188}">
+        <p14:section name="References" id="{8854c332-84b3-b5d6-dc2c-c553ebcf30b4}">
           <p14:sldIdLst>
             <p14:sldId id="278"/>
             <p14:sldId id="279"/>
           </p14:sldIdLst>
         </p14:section>
-        <p14:section name="Backup" id="{bad6d2d2-0585-eee7-da20-d561b299afa7}">
+        <p14:section name="Backup" id="{2daef122-0a7d-f76a-098b-7dd528221782}">
           <p14:sldIdLst>
             <p14:sldId id="280"/>
             <p14:sldId id="281"/>
@@ -9520,8 +9520,8 @@
             <a:tbl>
               <a:tblPr/>
               <a:tblGrid>
-                <a:gridCol w="2203704"/>
-                <a:gridCol w="4581144"/>
+                <a:gridCol w="2020824"/>
+                <a:gridCol w="4764024"/>
                 <a:gridCol w="4032504"/>
               </a:tblGrid>
               <a:tr h="0">
@@ -9534,14 +9534,14 @@
                         <a:buNone/>
                       </a:pPr>
                       <a:r>
-                        <a:rPr lang="en-US" sz="1500" b="1" dirty="0">
+                        <a:rPr lang="en-US" sz="1400" b="1" dirty="0">
                           <a:solidFill>
                             <a:schemeClr val="tx1"/>
                           </a:solidFill>
                         </a:rPr>
                         <a:t>Category</a:t>
                       </a:r>
-                      <a:endParaRPr lang="en-US" sz="1500" dirty="0"/>
+                      <a:endParaRPr lang="en-US" sz="1400" dirty="0"/>
                     </a:p>
                   </a:txBody>
                   <a:tcPr marL="25400" marR="101600" marT="63500" marB="63500" anchor="ctr">
@@ -9580,14 +9580,14 @@
                         <a:buNone/>
                       </a:pPr>
                       <a:r>
-                        <a:rPr lang="en-US" sz="1500" b="1" dirty="0">
+                        <a:rPr lang="en-US" sz="1400" b="1" dirty="0">
                           <a:solidFill>
                             <a:schemeClr val="tx1"/>
                           </a:solidFill>
                         </a:rPr>
                         <a:t>Risk factors (Table 55.1)</a:t>
                       </a:r>
-                      <a:endParaRPr lang="en-US" sz="1500" dirty="0"/>
+                      <a:endParaRPr lang="en-US" sz="1400" dirty="0"/>
                     </a:p>
                   </a:txBody>
                   <a:tcPr marL="25400" marR="101600" marT="63500" marB="63500" anchor="ctr">
@@ -9626,14 +9626,14 @@
                         <a:buNone/>
                       </a:pPr>
                       <a:r>
-                        <a:rPr lang="en-US" sz="1500" b="1" dirty="0">
+                        <a:rPr lang="en-US" sz="1400" b="1" dirty="0">
                           <a:solidFill>
                             <a:schemeClr val="tx1"/>
                           </a:solidFill>
                         </a:rPr>
                         <a:t>Threshold or note</a:t>
                       </a:r>
-                      <a:endParaRPr lang="en-US" sz="1500" dirty="0"/>
+                      <a:endParaRPr lang="en-US" sz="1400" dirty="0"/>
                     </a:p>
                   </a:txBody>
                   <a:tcPr marL="25400" marR="101600" marT="63500" marB="63500" anchor="ctr">
@@ -9674,14 +9674,14 @@
                         <a:buNone/>
                       </a:pPr>
                       <a:r>
-                        <a:rPr lang="en-US" sz="1500" dirty="0">
+                        <a:rPr lang="en-US" sz="1400" dirty="0">
                           <a:solidFill>
                             <a:schemeClr val="tx1"/>
                           </a:solidFill>
                         </a:rPr>
                         <a:t>Baseline</a:t>
                       </a:r>
-                      <a:endParaRPr lang="en-US" sz="1500" dirty="0"/>
+                      <a:endParaRPr lang="en-US" sz="1400" dirty="0"/>
                     </a:p>
                   </a:txBody>
                   <a:tcPr marL="25400" marR="101600" marT="63500" marB="63500" anchor="ctr">
@@ -9714,28 +9714,14 @@
                         <a:buNone/>
                       </a:pPr>
                       <a:r>
-                        <a:rPr lang="en-US" sz="1500" dirty="0">
-                          <a:solidFill>
-                            <a:schemeClr val="tx1"/>
-                          </a:solidFill>
-                        </a:rPr>
-                        <a:t>Family history, female sex, smoking,</a:t>
-                      </a:r>
-                      <a:endParaRPr lang="en-US" sz="1500" dirty="0"/>
-                    </a:p>
-                    <a:p>
-                      <a:pPr indent="0" marL="0">
-                        <a:buNone/>
-                      </a:pPr>
-                      <a:r>
-                        <a:rPr lang="en-US" sz="1500" dirty="0">
-                          <a:solidFill>
-                            <a:schemeClr val="tx1"/>
-                          </a:solidFill>
-                        </a:rPr>
-                        <a:t>HTN, dyslipidaemia, DM</a:t>
-                      </a:r>
-                      <a:endParaRPr lang="en-US" sz="1500" dirty="0"/>
+                        <a:rPr lang="en-US" sz="1400" dirty="0">
+                          <a:solidFill>
+                            <a:schemeClr val="tx1"/>
+                          </a:solidFill>
+                        </a:rPr>
+                        <a:t>Family history, female sex, smoking, HTN, DM</a:t>
+                      </a:r>
+                      <a:endParaRPr lang="en-US" sz="1400" dirty="0"/>
                     </a:p>
                   </a:txBody>
                   <a:tcPr marL="25400" marR="101600" marT="63500" marB="63500" anchor="ctr">
@@ -9768,14 +9754,14 @@
                         <a:buNone/>
                       </a:pPr>
                       <a:r>
-                        <a:rPr lang="en-US" sz="1500" dirty="0">
-                          <a:solidFill>
-                            <a:schemeClr val="tx1"/>
-                          </a:solidFill>
-                        </a:rPr>
-                        <a:t>Also obesity, sedentary habit, CKD</a:t>
-                      </a:r>
-                      <a:endParaRPr lang="en-US" sz="1500" dirty="0"/>
+                        <a:rPr lang="en-US" sz="1400" dirty="0">
+                          <a:solidFill>
+                            <a:schemeClr val="tx1"/>
+                          </a:solidFill>
+                        </a:rPr>
+                        <a:t>Also dyslipidaemia, obesity, inactivity, CKD</a:t>
+                      </a:r>
+                      <a:endParaRPr lang="en-US" sz="1400" dirty="0"/>
                     </a:p>
                   </a:txBody>
                   <a:tcPr marL="25400" marR="101600" marT="63500" marB="63500" anchor="ctr">
@@ -9810,14 +9796,14 @@
                         <a:buNone/>
                       </a:pPr>
                       <a:r>
-                        <a:rPr lang="en-US" sz="1500" dirty="0">
+                        <a:rPr lang="en-US" sz="1400" dirty="0">
                           <a:solidFill>
                             <a:schemeClr val="tx1"/>
                           </a:solidFill>
                         </a:rPr>
                         <a:t>Anthracyclines</a:t>
                       </a:r>
-                      <a:endParaRPr lang="en-US" sz="1500" dirty="0"/>
+                      <a:endParaRPr lang="en-US" sz="1400" dirty="0"/>
                     </a:p>
                   </a:txBody>
                   <a:tcPr marL="25400" marR="101600" marT="63500" marB="63500" anchor="ctr">
@@ -9850,14 +9836,14 @@
                         <a:buNone/>
                       </a:pPr>
                       <a:r>
-                        <a:rPr lang="en-US" sz="1500" dirty="0">
+                        <a:rPr lang="en-US" sz="1400" dirty="0">
                           <a:solidFill>
                             <a:schemeClr val="tx1"/>
                           </a:solidFill>
                         </a:rPr>
                         <a:t>Doxorubicin or equivalent</a:t>
                       </a:r>
-                      <a:endParaRPr lang="en-US" sz="1500" dirty="0"/>
+                      <a:endParaRPr lang="en-US" sz="1400" dirty="0"/>
                     </a:p>
                   </a:txBody>
                   <a:tcPr marL="25400" marR="101600" marT="63500" marB="63500" anchor="ctr">
@@ -9890,14 +9876,14 @@
                         <a:buNone/>
                       </a:pPr>
                       <a:r>
-                        <a:rPr lang="en-US" sz="1500" dirty="0">
+                        <a:rPr lang="en-US" sz="1400" dirty="0">
                           <a:solidFill>
                             <a:schemeClr val="tx1"/>
                           </a:solidFill>
                         </a:rPr>
                         <a:t>&gt; 250 mg/m²</a:t>
                       </a:r>
-                      <a:endParaRPr lang="en-US" sz="1500" dirty="0"/>
+                      <a:endParaRPr lang="en-US" sz="1400" dirty="0"/>
                     </a:p>
                   </a:txBody>
                   <a:tcPr marL="25400" marR="101600" marT="63500" marB="63500" anchor="ctr">
@@ -9932,14 +9918,14 @@
                         <a:buNone/>
                       </a:pPr>
                       <a:r>
-                        <a:rPr lang="en-US" sz="1500" dirty="0">
+                        <a:rPr lang="en-US" sz="1400" dirty="0">
                           <a:solidFill>
                             <a:schemeClr val="tx1"/>
                           </a:solidFill>
                         </a:rPr>
                         <a:t>Radiotherapy</a:t>
                       </a:r>
-                      <a:endParaRPr lang="en-US" sz="1500" dirty="0"/>
+                      <a:endParaRPr lang="en-US" sz="1400" dirty="0"/>
                     </a:p>
                   </a:txBody>
                   <a:tcPr marL="25400" marR="101600" marT="63500" marB="63500" anchor="ctr">
@@ -9972,14 +9958,14 @@
                         <a:buNone/>
                       </a:pPr>
                       <a:r>
-                        <a:rPr lang="en-US" sz="1500" dirty="0">
+                        <a:rPr lang="en-US" sz="1400" dirty="0">
                           <a:solidFill>
                             <a:schemeClr val="tx1"/>
                           </a:solidFill>
                         </a:rPr>
                         <a:t>Field including the heart</a:t>
                       </a:r>
-                      <a:endParaRPr lang="en-US" sz="1500" dirty="0"/>
+                      <a:endParaRPr lang="en-US" sz="1400" dirty="0"/>
                     </a:p>
                   </a:txBody>
                   <a:tcPr marL="25400" marR="101600" marT="63500" marB="63500" anchor="ctr">
@@ -10012,28 +9998,28 @@
                         <a:buNone/>
                       </a:pPr>
                       <a:r>
-                        <a:rPr lang="en-US" sz="1500" dirty="0">
+                        <a:rPr lang="en-US" sz="1400" dirty="0">
                           <a:solidFill>
                             <a:schemeClr val="tx1"/>
                           </a:solidFill>
                         </a:rPr>
                         <a:t>&gt; 35 Gy, or &gt; 15–35 Gy plus</a:t>
                       </a:r>
-                      <a:endParaRPr lang="en-US" sz="1500" dirty="0"/>
-                    </a:p>
-                    <a:p>
-                      <a:pPr indent="0" marL="0">
-                        <a:buNone/>
-                      </a:pPr>
-                      <a:r>
-                        <a:rPr lang="en-US" sz="1500" dirty="0">
+                      <a:endParaRPr lang="en-US" sz="1400" dirty="0"/>
+                    </a:p>
+                    <a:p>
+                      <a:pPr indent="0" marL="0">
+                        <a:buNone/>
+                      </a:pPr>
+                      <a:r>
+                        <a:rPr lang="en-US" sz="1400" dirty="0">
                           <a:solidFill>
                             <a:schemeClr val="tx1"/>
                           </a:solidFill>
                         </a:rPr>
                         <a:t>doxorubicin &gt; 100 mg/m²</a:t>
                       </a:r>
-                      <a:endParaRPr lang="en-US" sz="1500" dirty="0"/>
+                      <a:endParaRPr lang="en-US" sz="1400" dirty="0"/>
                     </a:p>
                   </a:txBody>
                   <a:tcPr marL="25400" marR="101600" marT="63500" marB="63500" anchor="ctr">
@@ -10068,14 +10054,14 @@
                         <a:buNone/>
                       </a:pPr>
                       <a:r>
-                        <a:rPr lang="en-US" sz="1500" dirty="0">
+                        <a:rPr lang="en-US" sz="1400" dirty="0">
                           <a:solidFill>
                             <a:schemeClr val="tx1"/>
                           </a:solidFill>
                         </a:rPr>
                         <a:t>Other therapy</a:t>
                       </a:r>
-                      <a:endParaRPr lang="en-US" sz="1500" dirty="0"/>
+                      <a:endParaRPr lang="en-US" sz="1400" dirty="0"/>
                     </a:p>
                   </a:txBody>
                   <a:tcPr marL="25400" marR="101600" marT="63500" marB="63500" anchor="ctr">
@@ -10108,28 +10094,14 @@
                         <a:buNone/>
                       </a:pPr>
                       <a:r>
-                        <a:rPr lang="en-US" sz="1500" dirty="0">
-                          <a:solidFill>
-                            <a:schemeClr val="tx1"/>
-                          </a:solidFill>
-                        </a:rPr>
-                        <a:t>TBI, steroids; CY, Bu, melphalan,</a:t>
-                      </a:r>
-                      <a:endParaRPr lang="en-US" sz="1500" dirty="0"/>
-                    </a:p>
-                    <a:p>
-                      <a:pPr indent="0" marL="0">
-                        <a:buNone/>
-                      </a:pPr>
-                      <a:r>
-                        <a:rPr lang="en-US" sz="1500" dirty="0">
-                          <a:solidFill>
-                            <a:schemeClr val="tx1"/>
-                          </a:solidFill>
-                        </a:rPr>
-                        <a:t>thiotepa</a:t>
-                      </a:r>
-                      <a:endParaRPr lang="en-US" sz="1500" dirty="0"/>
+                        <a:rPr lang="en-US" sz="1400" dirty="0">
+                          <a:solidFill>
+                            <a:schemeClr val="tx1"/>
+                          </a:solidFill>
+                        </a:rPr>
+                        <a:t>TBI, steroids, CY, Bu, melphalan, thiotepa</a:t>
+                      </a:r>
+                      <a:endParaRPr lang="en-US" sz="1400" dirty="0"/>
                     </a:p>
                   </a:txBody>
                   <a:tcPr marL="25400" marR="101600" marT="63500" marB="63500" anchor="ctr">
@@ -10162,28 +10134,28 @@
                         <a:buNone/>
                       </a:pPr>
                       <a:r>
-                        <a:rPr lang="en-US" sz="1500" dirty="0">
+                        <a:rPr lang="en-US" sz="1400" dirty="0">
                           <a:solidFill>
                             <a:schemeClr val="tx1"/>
                           </a:solidFill>
                         </a:rPr>
                         <a:t>PTCy: more early cardiac events</a:t>
                       </a:r>
-                      <a:endParaRPr lang="en-US" sz="1500" dirty="0"/>
-                    </a:p>
-                    <a:p>
-                      <a:pPr indent="0" marL="0">
-                        <a:buNone/>
-                      </a:pPr>
-                      <a:r>
-                        <a:rPr lang="en-US" sz="1500" dirty="0">
+                      <a:endParaRPr lang="en-US" sz="1400" dirty="0"/>
+                    </a:p>
+                    <a:p>
+                      <a:pPr indent="0" marL="0">
+                        <a:buNone/>
+                      </a:pPr>
+                      <a:r>
+                        <a:rPr lang="en-US" sz="1400" dirty="0">
                           <a:solidFill>
                             <a:schemeClr val="tx1"/>
                           </a:solidFill>
                         </a:rPr>
                         <a:t>(within 100 days)</a:t>
                       </a:r>
-                      <a:endParaRPr lang="en-US" sz="1500" dirty="0"/>
+                      <a:endParaRPr lang="en-US" sz="1400" dirty="0"/>
                     </a:p>
                   </a:txBody>
                   <a:tcPr marL="25400" marR="101600" marT="63500" marB="63500" anchor="ctr">
@@ -10218,14 +10190,14 @@
                         <a:buNone/>
                       </a:pPr>
                       <a:r>
-                        <a:rPr lang="en-US" sz="1500" dirty="0">
+                        <a:rPr lang="en-US" sz="1400" dirty="0">
                           <a:solidFill>
                             <a:schemeClr val="tx1"/>
                           </a:solidFill>
                         </a:rPr>
                         <a:t>GVHD</a:t>
                       </a:r>
-                      <a:endParaRPr lang="en-US" sz="1500" dirty="0"/>
+                      <a:endParaRPr lang="en-US" sz="1400" dirty="0"/>
                     </a:p>
                   </a:txBody>
                   <a:tcPr marL="25400" marR="101600" marT="63500" marB="63500" anchor="ctr">
@@ -10258,28 +10230,28 @@
                         <a:buNone/>
                       </a:pPr>
                       <a:r>
-                        <a:rPr lang="en-US" sz="1500" dirty="0">
+                        <a:rPr lang="en-US" sz="1400" dirty="0">
                           <a:solidFill>
                             <a:schemeClr val="tx1"/>
                           </a:solidFill>
                         </a:rPr>
                         <a:t>Prophylaxis with steroids or CNI;</a:t>
                       </a:r>
-                      <a:endParaRPr lang="en-US" sz="1500" dirty="0"/>
-                    </a:p>
-                    <a:p>
-                      <a:pPr indent="0" marL="0">
-                        <a:buNone/>
-                      </a:pPr>
-                      <a:r>
-                        <a:rPr lang="en-US" sz="1500" dirty="0">
+                      <a:endParaRPr lang="en-US" sz="1400" dirty="0"/>
+                    </a:p>
+                    <a:p>
+                      <a:pPr indent="0" marL="0">
+                        <a:buNone/>
+                      </a:pPr>
+                      <a:r>
+                        <a:rPr lang="en-US" sz="1400" dirty="0">
                           <a:solidFill>
                             <a:schemeClr val="tx1"/>
                           </a:solidFill>
                         </a:rPr>
                         <a:t>aGVHD II–IV, any cGVHD</a:t>
                       </a:r>
-                      <a:endParaRPr lang="en-US" sz="1500" dirty="0"/>
+                      <a:endParaRPr lang="en-US" sz="1400" dirty="0"/>
                     </a:p>
                   </a:txBody>
                   <a:tcPr marL="25400" marR="101600" marT="63500" marB="63500" anchor="ctr">
@@ -10312,14 +10284,14 @@
                         <a:buNone/>
                       </a:pPr>
                       <a:r>
-                        <a:rPr lang="en-US" sz="1500" dirty="0">
+                        <a:rPr lang="en-US" sz="1400" dirty="0">
                           <a:solidFill>
                             <a:schemeClr val="tx1"/>
                           </a:solidFill>
                         </a:rPr>
                         <a:t>Screen for TBI, GVHD and CNI use</a:t>
                       </a:r>
-                      <a:endParaRPr lang="en-US" sz="1500" dirty="0"/>
+                      <a:endParaRPr lang="en-US" sz="1400" dirty="0"/>
                     </a:p>
                   </a:txBody>
                   <a:tcPr marL="25400" marR="101600" marT="63500" marB="63500" anchor="ctr">
@@ -10354,14 +10326,14 @@
                         <a:buNone/>
                       </a:pPr>
                       <a:r>
-                        <a:rPr lang="en-US" sz="1500" dirty="0">
+                        <a:rPr lang="en-US" sz="1400" dirty="0">
                           <a:solidFill>
                             <a:schemeClr val="tx1"/>
                           </a:solidFill>
                         </a:rPr>
                         <a:t>Other late effects</a:t>
                       </a:r>
-                      <a:endParaRPr lang="en-US" sz="1500" dirty="0"/>
+                      <a:endParaRPr lang="en-US" sz="1400" dirty="0"/>
                     </a:p>
                   </a:txBody>
                   <a:tcPr marL="25400" marR="101600" marT="63500" marB="63500" anchor="ctr">
@@ -10394,28 +10366,14 @@
                         <a:buNone/>
                       </a:pPr>
                       <a:r>
-                        <a:rPr lang="en-US" sz="1500" dirty="0">
-                          <a:solidFill>
-                            <a:schemeClr val="tx1"/>
-                          </a:solidFill>
-                        </a:rPr>
-                        <a:t>Hypogonadism, early menopause,</a:t>
-                      </a:r>
-                      <a:endParaRPr lang="en-US" sz="1500" dirty="0"/>
-                    </a:p>
-                    <a:p>
-                      <a:pPr indent="0" marL="0">
-                        <a:buNone/>
-                      </a:pPr>
-                      <a:r>
-                        <a:rPr lang="en-US" sz="1500" dirty="0">
-                          <a:solidFill>
-                            <a:schemeClr val="tx1"/>
-                          </a:solidFill>
-                        </a:rPr>
-                        <a:t>hypothyroidism</a:t>
-                      </a:r>
-                      <a:endParaRPr lang="en-US" sz="1500" dirty="0"/>
+                        <a:rPr lang="en-US" sz="1400" dirty="0">
+                          <a:solidFill>
+                            <a:schemeClr val="tx1"/>
+                          </a:solidFill>
+                        </a:rPr>
+                        <a:t>Hypogonadism, early menopause, hypothyroidism</a:t>
+                      </a:r>
+                      <a:endParaRPr lang="en-US" sz="1400" dirty="0"/>
                     </a:p>
                   </a:txBody>
                   <a:tcPr marL="25400" marR="101600" marT="63500" marB="63500" anchor="ctr">
@@ -10448,14 +10406,14 @@
                         <a:buNone/>
                       </a:pPr>
                       <a:r>
-                        <a:rPr lang="en-US" sz="1500" dirty="0">
+                        <a:rPr lang="en-US" sz="1400" dirty="0">
                           <a:solidFill>
                             <a:schemeClr val="tx1"/>
                           </a:solidFill>
                         </a:rPr>
                         <a:t>Treat as CV risk factors</a:t>
                       </a:r>
-                      <a:endParaRPr lang="en-US" sz="1500" dirty="0"/>
+                      <a:endParaRPr lang="en-US" sz="1400" dirty="0"/>
                     </a:p>
                   </a:txBody>
                   <a:tcPr marL="25400" marR="101600" marT="63500" marB="63500" anchor="ctr">
@@ -10492,7 +10450,7 @@
         </p:nvSpPr>
         <p:spPr>
           <a:xfrm>
-            <a:off x="685800" y="5504688"/>
+            <a:off x="685800" y="5349240"/>
             <a:ext cx="10817352" cy="411480"/>
           </a:xfrm>
           <a:prstGeom prst="rect">

--- a/slides/decks/s18-late-effects.pptx
+++ b/slides/decks/s18-late-effects.pptx
@@ -134,26 +134,26 @@
   <p:extLst>
     <p:ext uri="{521415D9-36F7-43E2-AB2F-B90AF26B5E84}">
       <p14:sectionLst xmlns:p14="http://schemas.microsoft.com/office/powerpoint/2010/main">
-        <p14:section name="Opening" id="{dcf01893-834e-aab1-fc21-f7cedd8463d7}">
+        <p14:section name="Opening" id="{cb6e863d-f2de-c12e-3a78-57b3defaa7f3}">
           <p14:sldIdLst>
             <p14:sldId id="256"/>
             <p14:sldId id="257"/>
           </p14:sldIdLst>
         </p14:section>
-        <p14:section name="Follow-up framework" id="{5a396199-593c-4322-e132-dcfbf7e50abc}">
+        <p14:section name="Follow-up framework" id="{fda6f152-10bf-8d23-30d7-51272175472e}">
           <p14:sldIdLst>
             <p14:sldId id="258"/>
             <p14:sldId id="259"/>
           </p14:sldIdLst>
         </p14:section>
-        <p14:section name="Iron overload" id="{c7246153-e45c-a53f-95fe-d58b1c0d5de0}">
+        <p14:section name="Iron overload" id="{8c081bbb-06e1-620d-627a-b67987f47c43}">
           <p14:sldIdLst>
             <p14:sldId id="260"/>
             <p14:sldId id="261"/>
             <p14:sldId id="262"/>
           </p14:sldIdLst>
         </p14:section>
-        <p14:section name="Secondary neoplasia" id="{b8aa829a-e17d-4aab-1ae9-3e14af048604}">
+        <p14:section name="Secondary neoplasia" id="{04956057-9dd6-3d2d-fe06-b6181d51e6ce}">
           <p14:sldIdLst>
             <p14:sldId id="263"/>
             <p14:sldId id="264"/>
@@ -161,20 +161,20 @@
             <p14:sldId id="266"/>
           </p14:sldIdLst>
         </p14:section>
-        <p14:section name="Cardiometabolic disease" id="{dde81a40-bfff-6eb2-7c0d-b8f707367428}">
+        <p14:section name="Cardiometabolic disease" id="{8acd714c-a3ef-7606-d1ff-69cf8794c4b7}">
           <p14:sldIdLst>
             <p14:sldId id="267"/>
             <p14:sldId id="268"/>
           </p14:sldIdLst>
         </p14:section>
-        <p14:section name="Endocrine and fertility" id="{d906355c-0cde-543a-96bd-355c34dddee6}">
+        <p14:section name="Endocrine and fertility" id="{7a2baefd-41f2-ee12-2998-66b1f659221e}">
           <p14:sldIdLst>
             <p14:sldId id="269"/>
             <p14:sldId id="270"/>
             <p14:sldId id="271"/>
           </p14:sldIdLst>
         </p14:section>
-        <p14:section name="Board questions" id="{7104862d-9856-02ee-a79c-d93b8d071b46}">
+        <p14:section name="Board questions" id="{e54adebc-1b4b-c510-bbcf-cf339b7998c7}">
           <p14:sldIdLst>
             <p14:sldId id="272"/>
             <p14:sldId id="273"/>
@@ -184,13 +184,13 @@
             <p14:sldId id="277"/>
           </p14:sldIdLst>
         </p14:section>
-        <p14:section name="References" id="{8854c332-84b3-b5d6-dc2c-c553ebcf30b4}">
+        <p14:section name="References" id="{fc1332bd-3a46-7f57-1272-95bf6c57707f}">
           <p14:sldIdLst>
             <p14:sldId id="278"/>
             <p14:sldId id="279"/>
           </p14:sldIdLst>
         </p14:section>
-        <p14:section name="Backup" id="{2daef122-0a7d-f76a-098b-7dd528221782}">
+        <p14:section name="Backup" id="{3938c673-6142-c219-21a1-b68bce61c51a}">
           <p14:sldIdLst>
             <p14:sldId id="280"/>
             <p14:sldId id="281"/>
@@ -12130,7 +12130,7 @@
                             <a:schemeClr val="tx1"/>
                           </a:solidFill>
                         </a:rPr>
-                        <a:t>Alkylators worst; BuCy very gonadotoxic;</a:t>
+                        <a:t>Alkylators worst, esp. BuCy;</a:t>
                       </a:r>
                       <a:endParaRPr lang="en-US" sz="1500" dirty="0"/>
                     </a:p>
@@ -12416,7 +12416,7 @@
                             <a:schemeClr val="tx1"/>
                           </a:solidFill>
                         </a:rPr>
-                        <a:t>Oocyte LD50 &lt; 2 Gy; ESD 18.4 Gy at 10 y,</a:t>
+                        <a:t>Oocyte LD50 &lt; 2 Gy; ESD 18.4 Gy</a:t>
                       </a:r>
                       <a:endParaRPr lang="en-US" sz="1500" dirty="0"/>
                     </a:p>
@@ -12430,7 +12430,7 @@
                             <a:schemeClr val="tx1"/>
                           </a:solidFill>
                         </a:rPr>
-                        <a:t>14.3 Gy at 30 y, 6 Gy over 40</a:t>
+                        <a:t>(age 10), 14.3 (30), 6 (&gt; 40)</a:t>
                       </a:r>
                       <a:endParaRPr lang="en-US" sz="1500" dirty="0"/>
                     </a:p>
@@ -12620,7 +12620,7 @@
                             <a:schemeClr val="tx1"/>
                           </a:solidFill>
                         </a:rPr>
-                        <a:t>Testosterone usually normal (Leydig</a:t>
+                        <a:t>Testosterone usually normal</a:t>
                       </a:r>
                       <a:endParaRPr lang="en-US" sz="1500" dirty="0"/>
                     </a:p>
@@ -12634,7 +12634,7 @@
                             <a:schemeClr val="tx1"/>
                           </a:solidFill>
                         </a:rPr>
-                        <a:t>cells resist); monitor yearly</a:t>
+                        <a:t>(Leydig spared); check yearly</a:t>
                       </a:r>
                       <a:endParaRPr lang="en-US" sz="1500" dirty="0"/>
                     </a:p>
@@ -12730,7 +12730,7 @@
                             <a:schemeClr val="tx1"/>
                           </a:solidFill>
                         </a:rPr>
-                        <a:t>preterm birth, low birth weight</a:t>
+                        <a:t>preterm, low birth weight</a:t>
                       </a:r>
                       <a:endParaRPr lang="en-US" sz="1500" dirty="0"/>
                     </a:p>
@@ -20552,7 +20552,7 @@
                             <a:schemeClr val="tx1"/>
                           </a:solidFill>
                         </a:rPr>
-                        <a:t>Live near centre 3–6 months; weekly in</a:t>
+                        <a:t>Live near centre 3–6 m; weekly in</a:t>
                       </a:r>
                       <a:endParaRPr lang="en-US" sz="1500" dirty="0"/>
                     </a:p>
@@ -20566,7 +20566,7 @@
                             <a:schemeClr val="tx1"/>
                           </a:solidFill>
                         </a:rPr>
-                        <a:t>month 1, every 2 weeks to month 3</a:t>
+                        <a:t>month 1, 2-weekly to month 3</a:t>
                       </a:r>
                       <a:endParaRPr lang="en-US" sz="1500" dirty="0"/>
                     </a:p>
@@ -20852,7 +20852,7 @@
                             <a:schemeClr val="tx1"/>
                           </a:solidFill>
                         </a:rPr>
-                        <a:t>Chimerism at months 1 and 2; marrow</a:t>
+                        <a:t>Chimerism at months 1 and 2;</a:t>
                       </a:r>
                       <a:endParaRPr lang="en-US" sz="1500" dirty="0"/>
                     </a:p>
@@ -20866,7 +20866,7 @@
                             <a:schemeClr val="tx1"/>
                           </a:solidFill>
                         </a:rPr>
-                        <a:t>~1 month if previously involved</a:t>
+                        <a:t>marrow ~1 m if involved</a:t>
                       </a:r>
                       <a:endParaRPr lang="en-US" sz="1500" dirty="0"/>
                     </a:p>
@@ -21002,7 +21002,7 @@
                             <a:schemeClr val="tx1"/>
                           </a:solidFill>
                         </a:rPr>
-                        <a:t>Care may return to referring doctor;</a:t>
+                        <a:t>Back to referring doctor; age &lt; 17:</a:t>
                       </a:r>
                       <a:endParaRPr lang="en-US" sz="1500" dirty="0"/>
                     </a:p>
@@ -21016,7 +21016,7 @@
                             <a:schemeClr val="tx1"/>
                           </a:solidFill>
                         </a:rPr>
-                        <a:t>children &lt; 17 y: height, weight every 3 m</a:t>
+                        <a:t>height, weight every 3 m</a:t>
                       </a:r>
                       <a:endParaRPr lang="en-US" sz="1500" dirty="0"/>
                     </a:p>
@@ -23581,7 +23581,7 @@
                             <a:schemeClr val="tx1"/>
                           </a:solidFill>
                         </a:rPr>
-                        <a:t>No quantitative link to the iron pool;</a:t>
+                        <a:t>No quantitative link to iron pool;</a:t>
                       </a:r>
                       <a:endParaRPr lang="en-US" sz="1500" dirty="0"/>
                     </a:p>
@@ -23595,7 +23595,7 @@
                             <a:schemeClr val="tx1"/>
                           </a:solidFill>
                         </a:rPr>
-                        <a:t>less reliable if poly-transfused</a:t>
+                        <a:t>limited if poly-transfused</a:t>
                       </a:r>
                       <a:endParaRPr lang="en-US" sz="1500" dirty="0"/>
                     </a:p>
@@ -23731,7 +23731,7 @@
                             <a:schemeClr val="tx1"/>
                           </a:solidFill>
                         </a:rPr>
-                        <a:t>Raised by inflammation, infection,</a:t>
+                        <a:t>Raised by inflammation, infection</a:t>
                       </a:r>
                       <a:endParaRPr lang="en-US" sz="1500" dirty="0"/>
                     </a:p>
@@ -23745,7 +23745,7 @@
                             <a:schemeClr val="tx1"/>
                           </a:solidFill>
                         </a:rPr>
-                        <a:t>liver disease; nonlinear when high</a:t>
+                        <a:t>or liver disease</a:t>
                       </a:r>
                       <a:endParaRPr lang="en-US" sz="1500" dirty="0"/>
                     </a:p>

--- a/slides/decks/s18-late-effects.pptx
+++ b/slides/decks/s18-late-effects.pptx
@@ -134,26 +134,26 @@
   <p:extLst>
     <p:ext uri="{521415D9-36F7-43E2-AB2F-B90AF26B5E84}">
       <p14:sectionLst xmlns:p14="http://schemas.microsoft.com/office/powerpoint/2010/main">
-        <p14:section name="Opening" id="{cb6e863d-f2de-c12e-3a78-57b3defaa7f3}">
+        <p14:section name="Opening" id="{e1abbec9-f4f5-4601-174b-b0903aa9e27f}">
           <p14:sldIdLst>
             <p14:sldId id="256"/>
             <p14:sldId id="257"/>
           </p14:sldIdLst>
         </p14:section>
-        <p14:section name="Follow-up framework" id="{fda6f152-10bf-8d23-30d7-51272175472e}">
+        <p14:section name="Follow-up framework" id="{727f6928-2cb6-72e9-b463-91d2bc55a01d}">
           <p14:sldIdLst>
             <p14:sldId id="258"/>
             <p14:sldId id="259"/>
           </p14:sldIdLst>
         </p14:section>
-        <p14:section name="Iron overload" id="{8c081bbb-06e1-620d-627a-b67987f47c43}">
+        <p14:section name="Iron overload" id="{99dbe598-d5c5-cbde-59ba-ae38a1cf2b7a}">
           <p14:sldIdLst>
             <p14:sldId id="260"/>
             <p14:sldId id="261"/>
             <p14:sldId id="262"/>
           </p14:sldIdLst>
         </p14:section>
-        <p14:section name="Secondary neoplasia" id="{04956057-9dd6-3d2d-fe06-b6181d51e6ce}">
+        <p14:section name="Secondary neoplasia" id="{035fce06-e83d-88ff-de62-7177e3dc6167}">
           <p14:sldIdLst>
             <p14:sldId id="263"/>
             <p14:sldId id="264"/>
@@ -161,20 +161,20 @@
             <p14:sldId id="266"/>
           </p14:sldIdLst>
         </p14:section>
-        <p14:section name="Cardiometabolic disease" id="{8acd714c-a3ef-7606-d1ff-69cf8794c4b7}">
+        <p14:section name="Cardiometabolic disease" id="{6f9d609a-7835-b1bc-d912-998f81209c87}">
           <p14:sldIdLst>
             <p14:sldId id="267"/>
             <p14:sldId id="268"/>
           </p14:sldIdLst>
         </p14:section>
-        <p14:section name="Endocrine and fertility" id="{7a2baefd-41f2-ee12-2998-66b1f659221e}">
+        <p14:section name="Endocrine and fertility" id="{72397f0b-5278-60d2-ffe3-3ccd4db1a222}">
           <p14:sldIdLst>
             <p14:sldId id="269"/>
             <p14:sldId id="270"/>
             <p14:sldId id="271"/>
           </p14:sldIdLst>
         </p14:section>
-        <p14:section name="Board questions" id="{e54adebc-1b4b-c510-bbcf-cf339b7998c7}">
+        <p14:section name="Board questions" id="{7a1dec78-d72a-e4e0-33ff-12b28c9f1959}">
           <p14:sldIdLst>
             <p14:sldId id="272"/>
             <p14:sldId id="273"/>
@@ -184,13 +184,13 @@
             <p14:sldId id="277"/>
           </p14:sldIdLst>
         </p14:section>
-        <p14:section name="References" id="{fc1332bd-3a46-7f57-1272-95bf6c57707f}">
+        <p14:section name="References" id="{be16f0b0-2a60-11e9-8422-453475b20bd8}">
           <p14:sldIdLst>
             <p14:sldId id="278"/>
             <p14:sldId id="279"/>
           </p14:sldIdLst>
         </p14:section>
-        <p14:section name="Backup" id="{3938c673-6142-c219-21a1-b68bce61c51a}">
+        <p14:section name="Backup" id="{cd9bca12-afdd-9e47-99ed-29b3c0c42cc7}">
           <p14:sldIdLst>
             <p14:sldId id="280"/>
             <p14:sldId id="281"/>
